--- a/Day3_MixedModels_ModelSelection/FW536_Day3_Afternoon_hypothesis test and model selection_nosoln_accessible.pptx
+++ b/Day3_MixedModels_ModelSelection/FW536_Day3_Afternoon_hypothesis test and model selection_nosoln_accessible.pptx
@@ -27359,7 +27359,7 @@
                 </a:solidFill>
                 <a:latin typeface="Arial"/>
               </a:rPr>
-              <a:t>But it can only compare the models you wrote down \u2014 and every one of them is a straight-line combination of the terms you chose.</a:t>
+              <a:t>But it can only compare the models you wrote down — and every one of them is a straight-line combination of the terms you chose.</a:t>
             </a:r>
           </a:p>
           <a:p>

--- a/Day3_MixedModels_ModelSelection/FW536_Day3_Afternoon_hypothesis test and model selection_nosoln_accessible.pptx
+++ b/Day3_MixedModels_ModelSelection/FW536_Day3_Afternoon_hypothesis test and model selection_nosoln_accessible.pptx
@@ -6338,7 +6338,12 @@
             <a:spAutoFit/>
           </a:bodyPr>
           <a:lstStyle/>
-          <a:p/>
+          <a:p>
+            <a:r>
+              <a:rPr lang="en-US" u="sng" dirty="0"/>
+              <a:t>No Need for LRT, just interpret coefficients</a:t>
+            </a:r>
+          </a:p>
         </p:txBody>
       </p:sp>
       <p:sp>
@@ -8670,6 +8675,30 @@
               <a:buFontTx/>
               <a:buNone/>
             </a:pPr>
+            <a:r>
+              <a:rPr lang="en-US" altLang="en-US" sz="2400" dirty="0">
+                <a:latin typeface="Tahoma" charset="0"/>
+              </a:rPr>
+              <a:t>REJECT THE NULL</a:t>
+            </a:r>
+          </a:p>
+          <a:p>
+            <a:pPr algn="ctr" eaLnBrk="1" hangingPunct="1">
+              <a:lnSpc>
+                <a:spcPct val="100000"/>
+              </a:lnSpc>
+              <a:spcBef>
+                <a:spcPct val="0"/>
+              </a:spcBef>
+              <a:buFontTx/>
+              <a:buNone/>
+            </a:pPr>
+            <a:r>
+              <a:rPr lang="en-US" altLang="en-US" sz="1600" dirty="0">
+                <a:latin typeface="Tahoma" charset="0"/>
+              </a:rPr>
+              <a:t>That the one parameter model fits the data. Much better to use two parameters, indicating that the probability of running the red light has changed! </a:t>
+            </a:r>
           </a:p>
         </p:txBody>
       </p:sp>
@@ -10006,6 +10035,12 @@
               <a:buFontTx/>
               <a:buNone/>
             </a:pPr>
+            <a:r>
+              <a:rPr lang="en-US" altLang="en-US" sz="2400" dirty="0">
+                <a:latin typeface="Tahoma" charset="0"/>
+              </a:rPr>
+              <a:t>AIC and BIC are meaningless on their own, but models with lower values are more parsimonious (i.e. supported). They balance better fit with more parameters. This is exactly what the likelihood ratio test does.</a:t>
+            </a:r>
           </a:p>
         </p:txBody>
       </p:sp>
@@ -13526,6 +13561,12 @@
               <a:buFontTx/>
               <a:buNone/>
             </a:pPr>
+            <a:r>
+              <a:rPr lang="en-US" altLang="en-US" sz="2000">
+                <a:latin typeface="Tahoma" charset="0"/>
+              </a:rPr>
+              <a:t>(reject the null that the parameters equal 0)</a:t>
+            </a:r>
           </a:p>
         </p:txBody>
       </p:sp>
@@ -13742,6 +13783,24 @@
               <a:buFontTx/>
               <a:buNone/>
             </a:pPr>
+            <a:r>
+              <a:rPr lang="en-US" altLang="en-US" sz="2400" dirty="0">
+                <a:latin typeface="Tahoma" charset="0"/>
+              </a:rPr>
+              <a:t>2 </a:t>
+            </a:r>
+            <a:r>
+              <a:rPr lang="en-US" altLang="en-US" sz="2400" dirty="0" err="1">
+                <a:latin typeface="Tahoma" charset="0"/>
+              </a:rPr>
+              <a:t>deltaAIC</a:t>
+            </a:r>
+            <a:r>
+              <a:rPr lang="en-US" altLang="en-US" sz="2400" dirty="0">
+                <a:latin typeface="Tahoma" charset="0"/>
+              </a:rPr>
+              <a:t> still equivalent to p = 0.05 </a:t>
+            </a:r>
           </a:p>
         </p:txBody>
       </p:sp>
@@ -24076,6 +24135,136 @@
               <a:t>Why not just include all explanatory variables?</a:t>
             </a:r>
           </a:p>
+          <a:p>
+            <a:pPr marL="457200" indent="-457200">
+              <a:spcBef>
+                <a:spcPts val="1000"/>
+              </a:spcBef>
+              <a:buFont typeface="Arial"/>
+              <a:buChar char="•"/>
+            </a:pPr>
+            <a:r>
+              <a:rPr lang="en-US" sz="2200" b="1" dirty="0">
+                <a:solidFill>
+                  <a:srgbClr val="202040"/>
+                </a:solidFill>
+                <a:latin typeface="Arial"/>
+              </a:rPr>
+              <a:t>A: </a:t>
+            </a:r>
+            <a:r>
+              <a:rPr lang="en-US" sz="2200" dirty="0">
+                <a:solidFill>
+                  <a:srgbClr val="202040"/>
+                </a:solidFill>
+                <a:latin typeface="Arial"/>
+              </a:rPr>
+              <a:t>Extra predictors cost precision, and they are almost always correlated.</a:t>
+            </a:r>
+          </a:p>
+          <a:p>
+            <a:pPr marL="0" indent="0">
+              <a:spcBef>
+                <a:spcPts val="1000"/>
+              </a:spcBef>
+              <a:buNone/>
+            </a:pPr>
+            <a:r>
+              <a:rPr lang="en-US" sz="2000" b="1" dirty="0">
+                <a:solidFill>
+                  <a:srgbClr val="FF0000"/>
+                </a:solidFill>
+                <a:latin typeface="Arial"/>
+              </a:rPr>
+              <a:t>Too many predictors relative to sample size…</a:t>
+            </a:r>
+          </a:p>
+          <a:p>
+            <a:pPr marL="914400" indent="-457200">
+              <a:spcBef>
+                <a:spcPts val="600"/>
+              </a:spcBef>
+              <a:buFont typeface="Arial"/>
+              <a:buChar char="–"/>
+            </a:pPr>
+            <a:r>
+              <a:rPr lang="en-US" sz="2000" dirty="0">
+                <a:solidFill>
+                  <a:srgbClr val="FF0000"/>
+                </a:solidFill>
+                <a:latin typeface="Arial"/>
+              </a:rPr>
+              <a:t>fits noise as if it were signal (overfitting), so out-of-sample prediction gets worse;</a:t>
+            </a:r>
+          </a:p>
+          <a:p>
+            <a:pPr marL="914400" indent="-457200">
+              <a:spcBef>
+                <a:spcPts val="600"/>
+              </a:spcBef>
+              <a:buFont typeface="Arial"/>
+              <a:buChar char="–"/>
+            </a:pPr>
+            <a:r>
+              <a:rPr lang="en-US" sz="2000" dirty="0">
+                <a:solidFill>
+                  <a:srgbClr val="FF0000"/>
+                </a:solidFill>
+                <a:latin typeface="Arial"/>
+              </a:rPr>
+              <a:t>spends degrees of freedom, inflating variance of estimates and predictions.</a:t>
+            </a:r>
+          </a:p>
+          <a:p>
+            <a:pPr marL="0" indent="0">
+              <a:spcBef>
+                <a:spcPts val="1000"/>
+              </a:spcBef>
+              <a:buNone/>
+            </a:pPr>
+            <a:r>
+              <a:rPr lang="en-US" sz="2000" b="1" dirty="0">
+                <a:solidFill>
+                  <a:srgbClr val="2E3192"/>
+                </a:solidFill>
+                <a:latin typeface="Arial"/>
+              </a:rPr>
+              <a:t>Correlation among explanatory variables (collinearity)…</a:t>
+            </a:r>
+          </a:p>
+          <a:p>
+            <a:pPr marL="914400" indent="-457200">
+              <a:spcBef>
+                <a:spcPts val="600"/>
+              </a:spcBef>
+              <a:buFont typeface="Arial"/>
+              <a:buChar char="–"/>
+            </a:pPr>
+            <a:r>
+              <a:rPr lang="en-US" sz="2000" dirty="0">
+                <a:solidFill>
+                  <a:srgbClr val="2E3192"/>
+                </a:solidFill>
+                <a:latin typeface="Arial"/>
+              </a:rPr>
+              <a:t>inflates standard errors, so real effects are hard to detect;</a:t>
+            </a:r>
+          </a:p>
+          <a:p>
+            <a:pPr marL="914400" indent="-457200">
+              <a:spcBef>
+                <a:spcPts val="600"/>
+              </a:spcBef>
+              <a:buFont typeface="Arial"/>
+              <a:buChar char="–"/>
+            </a:pPr>
+            <a:r>
+              <a:rPr lang="en-US" sz="2000" dirty="0">
+                <a:latin typeface="Arial"/>
+              </a:rPr>
+              <a:t>makes individual coefficients unstable and hard to interpret — estimates are imprecise.</a:t>
+            </a:r>
+          </a:p>
         </p:txBody>
       </p:sp>
     </p:spTree>

--- a/Day3_MixedModels_ModelSelection/FW536_Day3_Afternoon_hypothesis test and model selection_nosoln_accessible.pptx
+++ b/Day3_MixedModels_ModelSelection/FW536_Day3_Afternoon_hypothesis test and model selection_nosoln_accessible.pptx
@@ -14715,78 +14715,191 @@
       </p:sp>
       <p:sp>
         <p:nvSpPr>
-          <p:cNvPr id="3" name="Content Placeholder 2">
-            <a:extLst>
-              <a:ext uri="{FF2B5EF4-FFF2-40B4-BE49-F238E27FC236}">
-                <a16:creationId xmlns:a16="http://schemas.microsoft.com/office/drawing/2014/main" id="{9735A929-1D30-A180-B146-E80D26B97D97}"/>
-              </a:ext>
-            </a:extLst>
-          </p:cNvPr>
-          <p:cNvSpPr>
-            <a:spLocks noGrp="1"/>
-          </p:cNvSpPr>
-          <p:nvPr>
-            <p:ph idx="1"/>
-          </p:nvPr>
+          <p:cNvPr id="11" name="TextBox 10"/>
+          <p:cNvSpPr txBox="1"/>
+          <p:nvPr/>
         </p:nvSpPr>
         <p:spPr>
           <a:xfrm>
-            <a:off x="643312" y="1966039"/>
-            <a:ext cx="10515600" cy="4351338"/>
+            <a:off x="640080" y="914400"/>
+            <a:ext cx="10908792" cy="457200"/>
           </a:xfrm>
+          <a:prstGeom prst="rect">
+            <a:avLst/>
+          </a:prstGeom>
+          <a:noFill/>
         </p:spPr>
         <p:txBody>
-          <a:bodyPr>
-            <a:normAutofit/>
+          <a:bodyPr wrap="square" lIns="0" rIns="0" tIns="0" bIns="0">
+            <a:spAutoFit/>
           </a:bodyPr>
           <a:lstStyle/>
           <a:p>
-            <a:r>
-              <a:rPr lang="en-US" u="sng" dirty="0"/>
+            <a:pPr algn="l">
+              <a:spcAft>
+                <a:spcPts val="0"/>
+              </a:spcAft>
+            </a:pPr>
+            <a:r>
+              <a:rPr sz="2500" b="1">
+                <a:solidFill>
+                  <a:srgbClr val="2E3A46"/>
+                </a:solidFill>
+                <a:latin typeface="Calibri"/>
+              </a:rPr>
               <a:t>Interpretation of relative AIC is not symmetric</a:t>
             </a:r>
           </a:p>
-          <a:p>
-            <a:pPr lvl="1"/>
-            <a:r>
-              <a:rPr lang="en-US" dirty="0"/>
-              <a:t>More complex model only “significantly better” if its AIC score is &gt;2 units </a:t>
-            </a:r>
-            <a:r>
-              <a:rPr lang="en-US" b="1" dirty="0"/>
-              <a:t>smaller</a:t>
-            </a:r>
-            <a:r>
-              <a:rPr lang="en-US" dirty="0"/>
-              <a:t>.</a:t>
-            </a:r>
-          </a:p>
-          <a:p>
-            <a:pPr lvl="1"/>
-            <a:r>
-              <a:rPr lang="en-US" dirty="0"/>
-              <a:t>Otherwise simpler and complex model are competitive</a:t>
-            </a:r>
-          </a:p>
-          <a:p>
-            <a:r>
-              <a:rPr lang="en-US" dirty="0"/>
-              <a:t>Penalty for adding parameter is 2 units and fit improves with complexity, so models with random data as predictor will be within 2 AIC. The complex model has no support even if within 2 AIC units</a:t>
-            </a:r>
-          </a:p>
-          <a:p>
-            <a:r>
-              <a:rPr lang="en-US" b="1" dirty="0"/>
-              <a:t>The 2 AIC convention is about whether a more complex model with </a:t>
-            </a:r>
-            <a:r>
-              <a:rPr lang="en-US" b="1" i="1" dirty="0"/>
-              <a:t>lower </a:t>
-            </a:r>
-            <a:r>
-              <a:rPr lang="en-US" b="1" dirty="0"/>
-              <a:t>AIC is better enough relative to simpler model (in the sense that the parameters are informative)</a:t>
-            </a:r>
+        </p:txBody>
+      </p:sp>
+      <p:sp>
+        <p:nvSpPr>
+          <p:cNvPr id="12" name="Rounded Rectangle 11"/>
+          <p:cNvSpPr/>
+          <p:nvPr/>
+        </p:nvSpPr>
+        <p:spPr>
+          <a:xfrm>
+            <a:off x="640080" y="1463040"/>
+            <a:ext cx="5285232" cy="1051560"/>
+          </a:xfrm>
+          <a:prstGeom prst="roundRect">
+            <a:avLst>
+              <a:gd name="adj" fmla="val 4000"/>
+            </a:avLst>
+          </a:prstGeom>
+          <a:solidFill>
+            <a:srgbClr val="F2F2F2"/>
+          </a:solidFill>
+          <a:ln w="12700">
+            <a:solidFill>
+              <a:srgbClr val="D9D9D9"/>
+            </a:solidFill>
+          </a:ln>
+          <a:effectLst/>
+        </p:spPr>
+        <p:style>
+          <a:lnRef idx="1">
+            <a:schemeClr val="accent1"/>
+          </a:lnRef>
+          <a:fillRef idx="3">
+            <a:schemeClr val="accent1"/>
+          </a:fillRef>
+          <a:effectRef idx="2">
+            <a:schemeClr val="accent1"/>
+          </a:effectRef>
+          <a:fontRef idx="minor">
+            <a:schemeClr val="lt1"/>
+          </a:fontRef>
+        </p:style>
+        <p:txBody>
+          <a:bodyPr rtlCol="0" anchor="ctr"/>
+          <a:lstStyle/>
+          <a:p>
+            <a:pPr algn="ctr"/>
+          </a:p>
+        </p:txBody>
+      </p:sp>
+      <p:sp>
+        <p:nvSpPr>
+          <p:cNvPr id="13" name="TextBox 12"/>
+          <p:cNvSpPr txBox="1"/>
+          <p:nvPr/>
+        </p:nvSpPr>
+        <p:spPr>
+          <a:xfrm>
+            <a:off x="841247" y="1572768"/>
+            <a:ext cx="4882896" cy="868680"/>
+          </a:xfrm>
+          <a:prstGeom prst="rect">
+            <a:avLst/>
+          </a:prstGeom>
+          <a:noFill/>
+        </p:spPr>
+        <p:txBody>
+          <a:bodyPr wrap="square" lIns="0" rIns="0" tIns="0" bIns="0">
+            <a:spAutoFit/>
+          </a:bodyPr>
+          <a:lstStyle/>
+          <a:p>
+            <a:pPr algn="l">
+              <a:spcAft>
+                <a:spcPts val="0"/>
+              </a:spcAft>
+            </a:pPr>
+            <a:r>
+              <a:rPr sz="1200" b="1">
+                <a:solidFill>
+                  <a:srgbClr val="C0504D"/>
+                </a:solidFill>
+                <a:latin typeface="Calibri"/>
+              </a:rPr>
+              <a:t>THE CLAIM</a:t>
+            </a:r>
+          </a:p>
+          <a:p>
+            <a:pPr algn="l">
+              <a:spcAft>
+                <a:spcPts val="0"/>
+              </a:spcAft>
+            </a:pPr>
+            <a:r>
+              <a:rPr sz="1650" b="0">
+                <a:solidFill>
+                  <a:srgbClr val="2E3A46"/>
+                </a:solidFill>
+                <a:latin typeface="Calibri"/>
+              </a:rPr>
+              <a:t>Two models within 2 AIC units of each other are “competitive.”</a:t>
+            </a:r>
+          </a:p>
+        </p:txBody>
+      </p:sp>
+      <p:sp>
+        <p:nvSpPr>
+          <p:cNvPr id="14" name="Rounded Rectangle 13"/>
+          <p:cNvSpPr/>
+          <p:nvPr/>
+        </p:nvSpPr>
+        <p:spPr>
+          <a:xfrm>
+            <a:off x="6263640" y="1463040"/>
+            <a:ext cx="5285232" cy="1051560"/>
+          </a:xfrm>
+          <a:prstGeom prst="roundRect">
+            <a:avLst>
+              <a:gd name="adj" fmla="val 4000"/>
+            </a:avLst>
+          </a:prstGeom>
+          <a:solidFill>
+            <a:srgbClr val="E8F1E6"/>
+          </a:solidFill>
+          <a:ln w="12700">
+            <a:solidFill>
+              <a:srgbClr val="C5D9C0"/>
+            </a:solidFill>
+          </a:ln>
+          <a:effectLst/>
+        </p:spPr>
+        <p:style>
+          <a:lnRef idx="1">
+            <a:schemeClr val="accent1"/>
+          </a:lnRef>
+          <a:fillRef idx="3">
+            <a:schemeClr val="accent1"/>
+          </a:fillRef>
+          <a:effectRef idx="2">
+            <a:schemeClr val="accent1"/>
+          </a:effectRef>
+          <a:fontRef idx="minor">
+            <a:schemeClr val="lt1"/>
+          </a:fontRef>
+        </p:style>
+        <p:txBody>
+          <a:bodyPr rtlCol="0" anchor="ctr"/>
+          <a:lstStyle/>
+          <a:p>
+            <a:pPr algn="ctr"/>
           </a:p>
         </p:txBody>
       </p:sp>
@@ -14798,8 +14911,8 @@
         </p:nvSpPr>
         <p:spPr>
           <a:xfrm>
-            <a:off x="3458743" y="1134853"/>
-            <a:ext cx="4884738" cy="603250"/>
+            <a:off x="6464807" y="1572768"/>
+            <a:ext cx="4882896" cy="868680"/>
           </a:xfrm>
           <a:prstGeom prst="rect">
             <a:avLst/>
@@ -14807,46 +14920,1270 @@
           <a:noFill/>
         </p:spPr>
         <p:txBody>
-          <a:bodyPr wrap="square" lIns="0" tIns="0" rIns="0" bIns="0" anchor="ctr">
+          <a:bodyPr wrap="square" lIns="0" rIns="0" tIns="0" bIns="0">
             <a:spAutoFit/>
           </a:bodyPr>
           <a:lstStyle/>
           <a:p>
-            <a:r>
-              <a:rPr sz="2600" b="0">
-                <a:latin typeface="Cambria"/>
+            <a:pPr algn="l">
+              <a:spcAft>
+                <a:spcPts val="0"/>
+              </a:spcAft>
+            </a:pPr>
+            <a:r>
+              <a:rPr sz="1200" b="1">
+                <a:solidFill>
+                  <a:srgbClr val="548235"/>
+                </a:solidFill>
+                <a:latin typeface="Calibri"/>
               </a:rPr>
-              <a:t>AIC</a:t>
-            </a:r>
-            <a:r>
-              <a:rPr sz="2600" b="0" baseline="-25000">
-                <a:latin typeface="Cambria"/>
+              <a:t>WHY IT FAILS</a:t>
+            </a:r>
+          </a:p>
+          <a:p>
+            <a:pPr algn="l">
+              <a:spcAft>
+                <a:spcPts val="0"/>
+              </a:spcAft>
+            </a:pPr>
+            <a:r>
+              <a:rPr sz="1650" b="0">
+                <a:solidFill>
+                  <a:srgbClr val="2E3A46"/>
+                </a:solidFill>
+                <a:latin typeface="Calibri"/>
               </a:rPr>
-              <a:t>i</a:t>
-            </a:r>
-            <a:r>
-              <a:rPr sz="2600" b="0">
-                <a:latin typeface="Cambria"/>
+              <a:t>Within 2 units is exactly where a pure-noise parameter always lands. It is the floor, not evidence.</a:t>
+            </a:r>
+          </a:p>
+        </p:txBody>
+      </p:sp>
+      <p:sp>
+        <p:nvSpPr>
+          <p:cNvPr id="16" name="TextBox 15"/>
+          <p:cNvSpPr txBox="1"/>
+          <p:nvPr/>
+        </p:nvSpPr>
+        <p:spPr>
+          <a:xfrm>
+            <a:off x="640080" y="2542032"/>
+            <a:ext cx="5669280" cy="347472"/>
+          </a:xfrm>
+          <a:prstGeom prst="rect">
+            <a:avLst/>
+          </a:prstGeom>
+          <a:noFill/>
+        </p:spPr>
+        <p:txBody>
+          <a:bodyPr wrap="square" lIns="0" rIns="0" tIns="0" bIns="0">
+            <a:spAutoFit/>
+          </a:bodyPr>
+          <a:lstStyle/>
+          <a:p>
+            <a:pPr algn="l">
+              <a:spcAft>
+                <a:spcPts val="0"/>
+              </a:spcAft>
+            </a:pPr>
+            <a:r>
+              <a:rPr sz="1900" b="1">
+                <a:solidFill>
+                  <a:srgbClr val="2E3A46"/>
+                </a:solidFill>
+                <a:latin typeface="Calibri"/>
               </a:rPr>
-              <a:t> = −2 log L</a:t>
-            </a:r>
-            <a:r>
-              <a:rPr sz="2600" b="0" baseline="-25000">
-                <a:latin typeface="Cambria"/>
+              <a:t>ΔAIC = AIC(complex) − AIC(simple) = 2 − χ²₁</a:t>
+            </a:r>
+          </a:p>
+        </p:txBody>
+      </p:sp>
+      <p:sp>
+        <p:nvSpPr>
+          <p:cNvPr id="17" name="TextBox 16"/>
+          <p:cNvSpPr txBox="1"/>
+          <p:nvPr/>
+        </p:nvSpPr>
+        <p:spPr>
+          <a:xfrm>
+            <a:off x="640080" y="2926080"/>
+            <a:ext cx="6035040" cy="292608"/>
+          </a:xfrm>
+          <a:prstGeom prst="rect">
+            <a:avLst/>
+          </a:prstGeom>
+          <a:noFill/>
+        </p:spPr>
+        <p:txBody>
+          <a:bodyPr wrap="square" lIns="0" rIns="0" tIns="0" bIns="0">
+            <a:spAutoFit/>
+          </a:bodyPr>
+          <a:lstStyle/>
+          <a:p>
+            <a:pPr algn="l">
+              <a:spcAft>
+                <a:spcPts val="0"/>
+              </a:spcAft>
+            </a:pPr>
+            <a:r>
+              <a:rPr sz="1350" b="0">
+                <a:solidFill>
+                  <a:srgbClr val="6B7A85"/>
+                </a:solidFill>
+                <a:latin typeface="Calibri"/>
               </a:rPr>
-              <a:t>i</a:t>
-            </a:r>
-            <a:r>
-              <a:rPr sz="2600" b="0">
-                <a:latin typeface="Cambria"/>
+              <a:t>χ²₁ = likelihood-ratio statistic for the one extra parameter</a:t>
+            </a:r>
+          </a:p>
+        </p:txBody>
+      </p:sp>
+      <p:sp>
+        <p:nvSpPr>
+          <p:cNvPr id="18" name="Rectangle 17"/>
+          <p:cNvSpPr/>
+          <p:nvPr/>
+        </p:nvSpPr>
+        <p:spPr>
+          <a:xfrm>
+            <a:off x="822960" y="3310128"/>
+            <a:ext cx="4217212" cy="658368"/>
+          </a:xfrm>
+          <a:prstGeom prst="rect">
+            <a:avLst/>
+          </a:prstGeom>
+          <a:solidFill>
+            <a:srgbClr val="548235"/>
+          </a:solidFill>
+          <a:ln w="19050">
+            <a:solidFill>
+              <a:srgbClr val="FFFFFF"/>
+            </a:solidFill>
+          </a:ln>
+          <a:effectLst/>
+        </p:spPr>
+        <p:style>
+          <a:lnRef idx="1">
+            <a:schemeClr val="accent1"/>
+          </a:lnRef>
+          <a:fillRef idx="3">
+            <a:schemeClr val="accent1"/>
+          </a:fillRef>
+          <a:effectRef idx="2">
+            <a:schemeClr val="accent1"/>
+          </a:effectRef>
+          <a:fontRef idx="minor">
+            <a:schemeClr val="lt1"/>
+          </a:fontRef>
+        </p:style>
+        <p:txBody>
+          <a:bodyPr rtlCol="0" anchor="ctr" wrap="square" tIns="0" bIns="0"/>
+          <a:lstStyle/>
+          <a:p>
+            <a:pPr algn="ctr">
+              <a:spcAft>
+                <a:spcPts val="0"/>
+              </a:spcAft>
+            </a:pPr>
+            <a:r>
+              <a:rPr sz="1500" b="1">
+                <a:solidFill>
+                  <a:srgbClr val="FFFFFF"/>
+                </a:solidFill>
+                <a:latin typeface="Calibri"/>
               </a:rPr>
-              <a:t> + 2 p</a:t>
-            </a:r>
-            <a:r>
-              <a:rPr sz="2600" b="0" baseline="-25000">
-                <a:latin typeface="Cambria"/>
+              <a:t>Real evidence</a:t>
+            </a:r>
+          </a:p>
+          <a:p>
+            <a:pPr algn="ctr"/>
+            <a:r>
+              <a:rPr sz="1150">
+                <a:solidFill>
+                  <a:srgbClr val="FFFFFF"/>
+                </a:solidFill>
+                <a:latin typeface="Calibri"/>
               </a:rPr>
-              <a:t>i</a:t>
+              <a:t>χ²₁ &gt; 4,  p &lt; 0.05</a:t>
+            </a:r>
+          </a:p>
+        </p:txBody>
+      </p:sp>
+      <p:sp>
+        <p:nvSpPr>
+          <p:cNvPr id="19" name="Rectangle 18"/>
+          <p:cNvSpPr/>
+          <p:nvPr/>
+        </p:nvSpPr>
+        <p:spPr>
+          <a:xfrm>
+            <a:off x="5040172" y="3310128"/>
+            <a:ext cx="2108606" cy="658368"/>
+          </a:xfrm>
+          <a:prstGeom prst="rect">
+            <a:avLst/>
+          </a:prstGeom>
+          <a:solidFill>
+            <a:srgbClr val="E08A1E"/>
+          </a:solidFill>
+          <a:ln w="19050">
+            <a:solidFill>
+              <a:srgbClr val="FFFFFF"/>
+            </a:solidFill>
+          </a:ln>
+          <a:effectLst/>
+        </p:spPr>
+        <p:style>
+          <a:lnRef idx="1">
+            <a:schemeClr val="accent1"/>
+          </a:lnRef>
+          <a:fillRef idx="3">
+            <a:schemeClr val="accent1"/>
+          </a:fillRef>
+          <a:effectRef idx="2">
+            <a:schemeClr val="accent1"/>
+          </a:effectRef>
+          <a:fontRef idx="minor">
+            <a:schemeClr val="lt1"/>
+          </a:fontRef>
+        </p:style>
+        <p:txBody>
+          <a:bodyPr rtlCol="0" anchor="ctr" wrap="square" tIns="0" bIns="0"/>
+          <a:lstStyle/>
+          <a:p>
+            <a:pPr algn="ctr">
+              <a:spcAft>
+                <a:spcPts val="0"/>
+              </a:spcAft>
+            </a:pPr>
+            <a:r>
+              <a:rPr sz="1500" b="1">
+                <a:solidFill>
+                  <a:srgbClr val="FFFFFF"/>
+                </a:solidFill>
+                <a:latin typeface="Calibri"/>
+              </a:rPr>
+              <a:t>Weak</a:t>
+            </a:r>
+          </a:p>
+          <a:p>
+            <a:pPr algn="ctr"/>
+            <a:r>
+              <a:rPr sz="1150">
+                <a:solidFill>
+                  <a:srgbClr val="FFFFFF"/>
+                </a:solidFill>
+                <a:latin typeface="Calibri"/>
+              </a:rPr>
+              <a:t>2 &lt; χ²₁ &lt; 4</a:t>
+            </a:r>
+          </a:p>
+        </p:txBody>
+      </p:sp>
+      <p:sp>
+        <p:nvSpPr>
+          <p:cNvPr id="20" name="Rectangle 19"/>
+          <p:cNvSpPr/>
+          <p:nvPr/>
+        </p:nvSpPr>
+        <p:spPr>
+          <a:xfrm>
+            <a:off x="7148779" y="3310128"/>
+            <a:ext cx="2108606" cy="658368"/>
+          </a:xfrm>
+          <a:prstGeom prst="rect">
+            <a:avLst/>
+          </a:prstGeom>
+          <a:solidFill>
+            <a:srgbClr val="C0504D"/>
+          </a:solidFill>
+          <a:ln w="19050">
+            <a:solidFill>
+              <a:srgbClr val="FFFFFF"/>
+            </a:solidFill>
+          </a:ln>
+          <a:effectLst/>
+        </p:spPr>
+        <p:style>
+          <a:lnRef idx="1">
+            <a:schemeClr val="accent1"/>
+          </a:lnRef>
+          <a:fillRef idx="3">
+            <a:schemeClr val="accent1"/>
+          </a:fillRef>
+          <a:effectRef idx="2">
+            <a:schemeClr val="accent1"/>
+          </a:effectRef>
+          <a:fontRef idx="minor">
+            <a:schemeClr val="lt1"/>
+          </a:fontRef>
+        </p:style>
+        <p:txBody>
+          <a:bodyPr rtlCol="0" anchor="ctr" wrap="square" tIns="0" bIns="0"/>
+          <a:lstStyle/>
+          <a:p>
+            <a:pPr algn="ctr">
+              <a:spcAft>
+                <a:spcPts val="0"/>
+              </a:spcAft>
+            </a:pPr>
+            <a:r>
+              <a:rPr sz="1500" b="1">
+                <a:solidFill>
+                  <a:srgbClr val="FFFFFF"/>
+                </a:solidFill>
+                <a:latin typeface="Calibri"/>
+              </a:rPr>
+              <a:t>No evidence</a:t>
+            </a:r>
+          </a:p>
+          <a:p>
+            <a:pPr algn="ctr"/>
+            <a:r>
+              <a:rPr sz="1150">
+                <a:solidFill>
+                  <a:srgbClr val="FFFFFF"/>
+                </a:solidFill>
+                <a:latin typeface="Calibri"/>
+              </a:rPr>
+              <a:t>0 &lt; χ²₁ &lt; 2</a:t>
+            </a:r>
+          </a:p>
+        </p:txBody>
+      </p:sp>
+      <p:sp>
+        <p:nvSpPr>
+          <p:cNvPr id="21" name="Rectangle 20"/>
+          <p:cNvSpPr/>
+          <p:nvPr/>
+        </p:nvSpPr>
+        <p:spPr>
+          <a:xfrm>
+            <a:off x="9257385" y="3310128"/>
+            <a:ext cx="2108606" cy="658368"/>
+          </a:xfrm>
+          <a:prstGeom prst="rect">
+            <a:avLst/>
+          </a:prstGeom>
+          <a:solidFill>
+            <a:srgbClr val="F7F7F7"/>
+          </a:solidFill>
+          <a:ln w="15875">
+            <a:solidFill>
+              <a:srgbClr val="BFBFBF"/>
+            </a:solidFill>
+            <a:prstDash val="dash"/>
+          </a:ln>
+          <a:effectLst/>
+        </p:spPr>
+        <p:style>
+          <a:lnRef idx="1">
+            <a:schemeClr val="accent1"/>
+          </a:lnRef>
+          <a:fillRef idx="3">
+            <a:schemeClr val="accent1"/>
+          </a:fillRef>
+          <a:effectRef idx="2">
+            <a:schemeClr val="accent1"/>
+          </a:effectRef>
+          <a:fontRef idx="minor">
+            <a:schemeClr val="lt1"/>
+          </a:fontRef>
+        </p:style>
+        <p:txBody>
+          <a:bodyPr rtlCol="0" anchor="ctr" wrap="square" tIns="0" bIns="0"/>
+          <a:lstStyle/>
+          <a:p>
+            <a:pPr algn="ctr">
+              <a:spcAft>
+                <a:spcPts val="0"/>
+              </a:spcAft>
+            </a:pPr>
+            <a:r>
+              <a:rPr sz="1400" b="1" i="1">
+                <a:solidFill>
+                  <a:srgbClr val="6B7A85"/>
+                </a:solidFill>
+                <a:latin typeface="Calibri"/>
+              </a:rPr>
+              <a:t>cannot happen</a:t>
+            </a:r>
+          </a:p>
+        </p:txBody>
+      </p:sp>
+      <p:sp>
+        <p:nvSpPr>
+          <p:cNvPr id="22" name="Rectangle 21"/>
+          <p:cNvSpPr/>
+          <p:nvPr/>
+        </p:nvSpPr>
+        <p:spPr>
+          <a:xfrm>
+            <a:off x="9237268" y="3127248"/>
+            <a:ext cx="40233" cy="1024128"/>
+          </a:xfrm>
+          <a:prstGeom prst="rect">
+            <a:avLst/>
+          </a:prstGeom>
+          <a:solidFill>
+            <a:srgbClr val="2E3A46"/>
+          </a:solidFill>
+          <a:ln>
+            <a:noFill/>
+          </a:ln>
+          <a:effectLst/>
+        </p:spPr>
+        <p:style>
+          <a:lnRef idx="1">
+            <a:schemeClr val="accent1"/>
+          </a:lnRef>
+          <a:fillRef idx="3">
+            <a:schemeClr val="accent1"/>
+          </a:fillRef>
+          <a:effectRef idx="2">
+            <a:schemeClr val="accent1"/>
+          </a:effectRef>
+          <a:fontRef idx="minor">
+            <a:schemeClr val="lt1"/>
+          </a:fontRef>
+        </p:style>
+        <p:txBody>
+          <a:bodyPr rtlCol="0" anchor="ctr"/>
+          <a:lstStyle/>
+          <a:p>
+            <a:pPr algn="ctr"/>
+          </a:p>
+        </p:txBody>
+      </p:sp>
+      <p:sp>
+        <p:nvSpPr>
+          <p:cNvPr id="23" name="TextBox 22"/>
+          <p:cNvSpPr txBox="1"/>
+          <p:nvPr/>
+        </p:nvSpPr>
+        <p:spPr>
+          <a:xfrm>
+            <a:off x="5965545" y="2523744"/>
+            <a:ext cx="3291840" cy="310896"/>
+          </a:xfrm>
+          <a:prstGeom prst="rect">
+            <a:avLst/>
+          </a:prstGeom>
+          <a:noFill/>
+        </p:spPr>
+        <p:txBody>
+          <a:bodyPr wrap="square" lIns="0" rIns="0" tIns="0" bIns="0">
+            <a:spAutoFit/>
+          </a:bodyPr>
+          <a:lstStyle/>
+          <a:p>
+            <a:pPr algn="r">
+              <a:spcAft>
+                <a:spcPts val="0"/>
+              </a:spcAft>
+            </a:pPr>
+            <a:r>
+              <a:rPr sz="1350" b="1">
+                <a:solidFill>
+                  <a:srgbClr val="2E3A46"/>
+                </a:solidFill>
+                <a:latin typeface="Calibri"/>
+              </a:rPr>
+              <a:t>hard ceiling at ΔAIC = 2  ▼</a:t>
+            </a:r>
+          </a:p>
+        </p:txBody>
+      </p:sp>
+      <p:sp>
+        <p:nvSpPr>
+          <p:cNvPr id="24" name="Rectangle 23"/>
+          <p:cNvSpPr/>
+          <p:nvPr/>
+        </p:nvSpPr>
+        <p:spPr>
+          <a:xfrm>
+            <a:off x="816559" y="3968496"/>
+            <a:ext cx="12801" cy="91440"/>
+          </a:xfrm>
+          <a:prstGeom prst="rect">
+            <a:avLst/>
+          </a:prstGeom>
+          <a:solidFill>
+            <a:srgbClr val="9AA5AD"/>
+          </a:solidFill>
+          <a:ln>
+            <a:noFill/>
+          </a:ln>
+          <a:effectLst/>
+        </p:spPr>
+        <p:style>
+          <a:lnRef idx="1">
+            <a:schemeClr val="accent1"/>
+          </a:lnRef>
+          <a:fillRef idx="3">
+            <a:schemeClr val="accent1"/>
+          </a:fillRef>
+          <a:effectRef idx="2">
+            <a:schemeClr val="accent1"/>
+          </a:effectRef>
+          <a:fontRef idx="minor">
+            <a:schemeClr val="lt1"/>
+          </a:fontRef>
+        </p:style>
+        <p:txBody>
+          <a:bodyPr rtlCol="0" anchor="ctr"/>
+          <a:lstStyle/>
+          <a:p>
+            <a:pPr algn="ctr"/>
+          </a:p>
+        </p:txBody>
+      </p:sp>
+      <p:sp>
+        <p:nvSpPr>
+          <p:cNvPr id="25" name="TextBox 24"/>
+          <p:cNvSpPr txBox="1"/>
+          <p:nvPr/>
+        </p:nvSpPr>
+        <p:spPr>
+          <a:xfrm>
+            <a:off x="365760" y="4078224"/>
+            <a:ext cx="914400" cy="256032"/>
+          </a:xfrm>
+          <a:prstGeom prst="rect">
+            <a:avLst/>
+          </a:prstGeom>
+          <a:noFill/>
+        </p:spPr>
+        <p:txBody>
+          <a:bodyPr wrap="square" lIns="0" rIns="0" tIns="0" bIns="0">
+            <a:spAutoFit/>
+          </a:bodyPr>
+          <a:lstStyle/>
+          <a:p>
+            <a:pPr algn="ctr">
+              <a:spcAft>
+                <a:spcPts val="0"/>
+              </a:spcAft>
+            </a:pPr>
+            <a:r>
+              <a:rPr sz="1300" b="0">
+                <a:solidFill>
+                  <a:srgbClr val="6B7A85"/>
+                </a:solidFill>
+                <a:latin typeface="Calibri"/>
+              </a:rPr>
+              <a:t>-6</a:t>
+            </a:r>
+          </a:p>
+        </p:txBody>
+      </p:sp>
+      <p:sp>
+        <p:nvSpPr>
+          <p:cNvPr id="26" name="Rectangle 25"/>
+          <p:cNvSpPr/>
+          <p:nvPr/>
+        </p:nvSpPr>
+        <p:spPr>
+          <a:xfrm>
+            <a:off x="2925165" y="3968496"/>
+            <a:ext cx="12801" cy="91440"/>
+          </a:xfrm>
+          <a:prstGeom prst="rect">
+            <a:avLst/>
+          </a:prstGeom>
+          <a:solidFill>
+            <a:srgbClr val="9AA5AD"/>
+          </a:solidFill>
+          <a:ln>
+            <a:noFill/>
+          </a:ln>
+          <a:effectLst/>
+        </p:spPr>
+        <p:style>
+          <a:lnRef idx="1">
+            <a:schemeClr val="accent1"/>
+          </a:lnRef>
+          <a:fillRef idx="3">
+            <a:schemeClr val="accent1"/>
+          </a:fillRef>
+          <a:effectRef idx="2">
+            <a:schemeClr val="accent1"/>
+          </a:effectRef>
+          <a:fontRef idx="minor">
+            <a:schemeClr val="lt1"/>
+          </a:fontRef>
+        </p:style>
+        <p:txBody>
+          <a:bodyPr rtlCol="0" anchor="ctr"/>
+          <a:lstStyle/>
+          <a:p>
+            <a:pPr algn="ctr"/>
+          </a:p>
+        </p:txBody>
+      </p:sp>
+      <p:sp>
+        <p:nvSpPr>
+          <p:cNvPr id="27" name="TextBox 26"/>
+          <p:cNvSpPr txBox="1"/>
+          <p:nvPr/>
+        </p:nvSpPr>
+        <p:spPr>
+          <a:xfrm>
+            <a:off x="2474366" y="4078224"/>
+            <a:ext cx="914400" cy="256032"/>
+          </a:xfrm>
+          <a:prstGeom prst="rect">
+            <a:avLst/>
+          </a:prstGeom>
+          <a:noFill/>
+        </p:spPr>
+        <p:txBody>
+          <a:bodyPr wrap="square" lIns="0" rIns="0" tIns="0" bIns="0">
+            <a:spAutoFit/>
+          </a:bodyPr>
+          <a:lstStyle/>
+          <a:p>
+            <a:pPr algn="ctr">
+              <a:spcAft>
+                <a:spcPts val="0"/>
+              </a:spcAft>
+            </a:pPr>
+            <a:r>
+              <a:rPr sz="1300" b="0">
+                <a:solidFill>
+                  <a:srgbClr val="6B7A85"/>
+                </a:solidFill>
+                <a:latin typeface="Calibri"/>
+              </a:rPr>
+              <a:t>-4</a:t>
+            </a:r>
+          </a:p>
+        </p:txBody>
+      </p:sp>
+      <p:sp>
+        <p:nvSpPr>
+          <p:cNvPr id="28" name="Rectangle 27"/>
+          <p:cNvSpPr/>
+          <p:nvPr/>
+        </p:nvSpPr>
+        <p:spPr>
+          <a:xfrm>
+            <a:off x="5033772" y="3968496"/>
+            <a:ext cx="12801" cy="91440"/>
+          </a:xfrm>
+          <a:prstGeom prst="rect">
+            <a:avLst/>
+          </a:prstGeom>
+          <a:solidFill>
+            <a:srgbClr val="9AA5AD"/>
+          </a:solidFill>
+          <a:ln>
+            <a:noFill/>
+          </a:ln>
+          <a:effectLst/>
+        </p:spPr>
+        <p:style>
+          <a:lnRef idx="1">
+            <a:schemeClr val="accent1"/>
+          </a:lnRef>
+          <a:fillRef idx="3">
+            <a:schemeClr val="accent1"/>
+          </a:fillRef>
+          <a:effectRef idx="2">
+            <a:schemeClr val="accent1"/>
+          </a:effectRef>
+          <a:fontRef idx="minor">
+            <a:schemeClr val="lt1"/>
+          </a:fontRef>
+        </p:style>
+        <p:txBody>
+          <a:bodyPr rtlCol="0" anchor="ctr"/>
+          <a:lstStyle/>
+          <a:p>
+            <a:pPr algn="ctr"/>
+          </a:p>
+        </p:txBody>
+      </p:sp>
+      <p:sp>
+        <p:nvSpPr>
+          <p:cNvPr id="29" name="TextBox 28"/>
+          <p:cNvSpPr txBox="1"/>
+          <p:nvPr/>
+        </p:nvSpPr>
+        <p:spPr>
+          <a:xfrm>
+            <a:off x="4582972" y="4078224"/>
+            <a:ext cx="914400" cy="256032"/>
+          </a:xfrm>
+          <a:prstGeom prst="rect">
+            <a:avLst/>
+          </a:prstGeom>
+          <a:noFill/>
+        </p:spPr>
+        <p:txBody>
+          <a:bodyPr wrap="square" lIns="0" rIns="0" tIns="0" bIns="0">
+            <a:spAutoFit/>
+          </a:bodyPr>
+          <a:lstStyle/>
+          <a:p>
+            <a:pPr algn="ctr">
+              <a:spcAft>
+                <a:spcPts val="0"/>
+              </a:spcAft>
+            </a:pPr>
+            <a:r>
+              <a:rPr sz="1300" b="0">
+                <a:solidFill>
+                  <a:srgbClr val="6B7A85"/>
+                </a:solidFill>
+                <a:latin typeface="Calibri"/>
+              </a:rPr>
+              <a:t>-2</a:t>
+            </a:r>
+          </a:p>
+        </p:txBody>
+      </p:sp>
+      <p:sp>
+        <p:nvSpPr>
+          <p:cNvPr id="30" name="Rectangle 29"/>
+          <p:cNvSpPr/>
+          <p:nvPr/>
+        </p:nvSpPr>
+        <p:spPr>
+          <a:xfrm>
+            <a:off x="7142378" y="3968496"/>
+            <a:ext cx="12801" cy="91440"/>
+          </a:xfrm>
+          <a:prstGeom prst="rect">
+            <a:avLst/>
+          </a:prstGeom>
+          <a:solidFill>
+            <a:srgbClr val="9AA5AD"/>
+          </a:solidFill>
+          <a:ln>
+            <a:noFill/>
+          </a:ln>
+          <a:effectLst/>
+        </p:spPr>
+        <p:style>
+          <a:lnRef idx="1">
+            <a:schemeClr val="accent1"/>
+          </a:lnRef>
+          <a:fillRef idx="3">
+            <a:schemeClr val="accent1"/>
+          </a:fillRef>
+          <a:effectRef idx="2">
+            <a:schemeClr val="accent1"/>
+          </a:effectRef>
+          <a:fontRef idx="minor">
+            <a:schemeClr val="lt1"/>
+          </a:fontRef>
+        </p:style>
+        <p:txBody>
+          <a:bodyPr rtlCol="0" anchor="ctr"/>
+          <a:lstStyle/>
+          <a:p>
+            <a:pPr algn="ctr"/>
+          </a:p>
+        </p:txBody>
+      </p:sp>
+      <p:sp>
+        <p:nvSpPr>
+          <p:cNvPr id="31" name="TextBox 30"/>
+          <p:cNvSpPr txBox="1"/>
+          <p:nvPr/>
+        </p:nvSpPr>
+        <p:spPr>
+          <a:xfrm>
+            <a:off x="6691579" y="4078224"/>
+            <a:ext cx="914400" cy="256032"/>
+          </a:xfrm>
+          <a:prstGeom prst="rect">
+            <a:avLst/>
+          </a:prstGeom>
+          <a:noFill/>
+        </p:spPr>
+        <p:txBody>
+          <a:bodyPr wrap="square" lIns="0" rIns="0" tIns="0" bIns="0">
+            <a:spAutoFit/>
+          </a:bodyPr>
+          <a:lstStyle/>
+          <a:p>
+            <a:pPr algn="ctr">
+              <a:spcAft>
+                <a:spcPts val="0"/>
+              </a:spcAft>
+            </a:pPr>
+            <a:r>
+              <a:rPr sz="1300" b="0">
+                <a:solidFill>
+                  <a:srgbClr val="6B7A85"/>
+                </a:solidFill>
+                <a:latin typeface="Calibri"/>
+              </a:rPr>
+              <a:t>0</a:t>
+            </a:r>
+          </a:p>
+        </p:txBody>
+      </p:sp>
+      <p:sp>
+        <p:nvSpPr>
+          <p:cNvPr id="32" name="Rectangle 31"/>
+          <p:cNvSpPr/>
+          <p:nvPr/>
+        </p:nvSpPr>
+        <p:spPr>
+          <a:xfrm>
+            <a:off x="9250984" y="3968496"/>
+            <a:ext cx="12801" cy="91440"/>
+          </a:xfrm>
+          <a:prstGeom prst="rect">
+            <a:avLst/>
+          </a:prstGeom>
+          <a:solidFill>
+            <a:srgbClr val="9AA5AD"/>
+          </a:solidFill>
+          <a:ln>
+            <a:noFill/>
+          </a:ln>
+          <a:effectLst/>
+        </p:spPr>
+        <p:style>
+          <a:lnRef idx="1">
+            <a:schemeClr val="accent1"/>
+          </a:lnRef>
+          <a:fillRef idx="3">
+            <a:schemeClr val="accent1"/>
+          </a:fillRef>
+          <a:effectRef idx="2">
+            <a:schemeClr val="accent1"/>
+          </a:effectRef>
+          <a:fontRef idx="minor">
+            <a:schemeClr val="lt1"/>
+          </a:fontRef>
+        </p:style>
+        <p:txBody>
+          <a:bodyPr rtlCol="0" anchor="ctr"/>
+          <a:lstStyle/>
+          <a:p>
+            <a:pPr algn="ctr"/>
+          </a:p>
+        </p:txBody>
+      </p:sp>
+      <p:sp>
+        <p:nvSpPr>
+          <p:cNvPr id="33" name="TextBox 32"/>
+          <p:cNvSpPr txBox="1"/>
+          <p:nvPr/>
+        </p:nvSpPr>
+        <p:spPr>
+          <a:xfrm>
+            <a:off x="8800185" y="4078224"/>
+            <a:ext cx="914400" cy="256032"/>
+          </a:xfrm>
+          <a:prstGeom prst="rect">
+            <a:avLst/>
+          </a:prstGeom>
+          <a:noFill/>
+        </p:spPr>
+        <p:txBody>
+          <a:bodyPr wrap="square" lIns="0" rIns="0" tIns="0" bIns="0">
+            <a:spAutoFit/>
+          </a:bodyPr>
+          <a:lstStyle/>
+          <a:p>
+            <a:pPr algn="ctr">
+              <a:spcAft>
+                <a:spcPts val="0"/>
+              </a:spcAft>
+            </a:pPr>
+            <a:r>
+              <a:rPr sz="1300" b="0">
+                <a:solidFill>
+                  <a:srgbClr val="6B7A85"/>
+                </a:solidFill>
+                <a:latin typeface="Calibri"/>
+              </a:rPr>
+              <a:t>+2</a:t>
+            </a:r>
+          </a:p>
+        </p:txBody>
+      </p:sp>
+      <p:sp>
+        <p:nvSpPr>
+          <p:cNvPr id="34" name="Rectangle 33"/>
+          <p:cNvSpPr/>
+          <p:nvPr/>
+        </p:nvSpPr>
+        <p:spPr>
+          <a:xfrm>
+            <a:off x="11359591" y="3968496"/>
+            <a:ext cx="12801" cy="91440"/>
+          </a:xfrm>
+          <a:prstGeom prst="rect">
+            <a:avLst/>
+          </a:prstGeom>
+          <a:solidFill>
+            <a:srgbClr val="9AA5AD"/>
+          </a:solidFill>
+          <a:ln>
+            <a:noFill/>
+          </a:ln>
+          <a:effectLst/>
+        </p:spPr>
+        <p:style>
+          <a:lnRef idx="1">
+            <a:schemeClr val="accent1"/>
+          </a:lnRef>
+          <a:fillRef idx="3">
+            <a:schemeClr val="accent1"/>
+          </a:fillRef>
+          <a:effectRef idx="2">
+            <a:schemeClr val="accent1"/>
+          </a:effectRef>
+          <a:fontRef idx="minor">
+            <a:schemeClr val="lt1"/>
+          </a:fontRef>
+        </p:style>
+        <p:txBody>
+          <a:bodyPr rtlCol="0" anchor="ctr"/>
+          <a:lstStyle/>
+          <a:p>
+            <a:pPr algn="ctr"/>
+          </a:p>
+        </p:txBody>
+      </p:sp>
+      <p:sp>
+        <p:nvSpPr>
+          <p:cNvPr id="35" name="TextBox 34"/>
+          <p:cNvSpPr txBox="1"/>
+          <p:nvPr/>
+        </p:nvSpPr>
+        <p:spPr>
+          <a:xfrm>
+            <a:off x="10908792" y="4078224"/>
+            <a:ext cx="914400" cy="256032"/>
+          </a:xfrm>
+          <a:prstGeom prst="rect">
+            <a:avLst/>
+          </a:prstGeom>
+          <a:noFill/>
+        </p:spPr>
+        <p:txBody>
+          <a:bodyPr wrap="square" lIns="0" rIns="0" tIns="0" bIns="0">
+            <a:spAutoFit/>
+          </a:bodyPr>
+          <a:lstStyle/>
+          <a:p>
+            <a:pPr algn="ctr">
+              <a:spcAft>
+                <a:spcPts val="0"/>
+              </a:spcAft>
+            </a:pPr>
+            <a:r>
+              <a:rPr sz="1300" b="0">
+                <a:solidFill>
+                  <a:srgbClr val="6B7A85"/>
+                </a:solidFill>
+                <a:latin typeface="Calibri"/>
+              </a:rPr>
+              <a:t>+4</a:t>
+            </a:r>
+          </a:p>
+        </p:txBody>
+      </p:sp>
+      <p:sp>
+        <p:nvSpPr>
+          <p:cNvPr id="36" name="TextBox 35"/>
+          <p:cNvSpPr txBox="1"/>
+          <p:nvPr/>
+        </p:nvSpPr>
+        <p:spPr>
+          <a:xfrm>
+            <a:off x="1417320" y="4352544"/>
+            <a:ext cx="3108960" cy="256032"/>
+          </a:xfrm>
+          <a:prstGeom prst="rect">
+            <a:avLst/>
+          </a:prstGeom>
+          <a:noFill/>
+        </p:spPr>
+        <p:txBody>
+          <a:bodyPr wrap="square" lIns="0" rIns="0" tIns="0" bIns="0">
+            <a:spAutoFit/>
+          </a:bodyPr>
+          <a:lstStyle/>
+          <a:p>
+            <a:pPr algn="l">
+              <a:spcAft>
+                <a:spcPts val="0"/>
+              </a:spcAft>
+            </a:pPr>
+            <a:r>
+              <a:rPr sz="1250" b="1">
+                <a:solidFill>
+                  <a:srgbClr val="6B7A85"/>
+                </a:solidFill>
+                <a:latin typeface="Calibri"/>
+              </a:rPr>
+              <a:t>◀  complex model better</a:t>
+            </a:r>
+          </a:p>
+        </p:txBody>
+      </p:sp>
+      <p:sp>
+        <p:nvSpPr>
+          <p:cNvPr id="37" name="TextBox 36"/>
+          <p:cNvSpPr txBox="1"/>
+          <p:nvPr/>
+        </p:nvSpPr>
+        <p:spPr>
+          <a:xfrm>
+            <a:off x="7662672" y="4352544"/>
+            <a:ext cx="3108960" cy="256032"/>
+          </a:xfrm>
+          <a:prstGeom prst="rect">
+            <a:avLst/>
+          </a:prstGeom>
+          <a:noFill/>
+        </p:spPr>
+        <p:txBody>
+          <a:bodyPr wrap="square" lIns="0" rIns="0" tIns="0" bIns="0">
+            <a:spAutoFit/>
+          </a:bodyPr>
+          <a:lstStyle/>
+          <a:p>
+            <a:pPr algn="r">
+              <a:spcAft>
+                <a:spcPts val="0"/>
+              </a:spcAft>
+            </a:pPr>
+            <a:r>
+              <a:rPr sz="1250" b="1">
+                <a:solidFill>
+                  <a:srgbClr val="6B7A85"/>
+                </a:solidFill>
+                <a:latin typeface="Calibri"/>
+              </a:rPr>
+              <a:t>complex model worse  ▶</a:t>
+            </a:r>
+          </a:p>
+        </p:txBody>
+      </p:sp>
+      <p:sp>
+        <p:nvSpPr>
+          <p:cNvPr id="38" name="TextBox 37"/>
+          <p:cNvSpPr txBox="1"/>
+          <p:nvPr/>
+        </p:nvSpPr>
+        <p:spPr>
+          <a:xfrm>
+            <a:off x="877824" y="4700016"/>
+            <a:ext cx="4107484" cy="731520"/>
+          </a:xfrm>
+          <a:prstGeom prst="rect">
+            <a:avLst/>
+          </a:prstGeom>
+          <a:noFill/>
+        </p:spPr>
+        <p:txBody>
+          <a:bodyPr wrap="square" lIns="0" rIns="0" tIns="0" bIns="0">
+            <a:spAutoFit/>
+          </a:bodyPr>
+          <a:lstStyle/>
+          <a:p>
+            <a:pPr algn="l">
+              <a:spcAft>
+                <a:spcPts val="0"/>
+              </a:spcAft>
+            </a:pPr>
+            <a:r>
+              <a:rPr sz="1250" b="0">
+                <a:solidFill>
+                  <a:srgbClr val="2E3A46"/>
+                </a:solidFill>
+                <a:latin typeface="Calibri"/>
+              </a:rPr>
+              <a:t>Complex model wins by more than 2 units. The only zone that is evidence.</a:t>
+            </a:r>
+          </a:p>
+        </p:txBody>
+      </p:sp>
+      <p:sp>
+        <p:nvSpPr>
+          <p:cNvPr id="39" name="TextBox 38"/>
+          <p:cNvSpPr txBox="1"/>
+          <p:nvPr/>
+        </p:nvSpPr>
+        <p:spPr>
+          <a:xfrm>
+            <a:off x="5095036" y="4700016"/>
+            <a:ext cx="1998878" cy="731520"/>
+          </a:xfrm>
+          <a:prstGeom prst="rect">
+            <a:avLst/>
+          </a:prstGeom>
+          <a:noFill/>
+        </p:spPr>
+        <p:txBody>
+          <a:bodyPr wrap="square" lIns="0" rIns="0" tIns="0" bIns="0">
+            <a:spAutoFit/>
+          </a:bodyPr>
+          <a:lstStyle/>
+          <a:p>
+            <a:pPr algn="l">
+              <a:spcAft>
+                <a:spcPts val="0"/>
+              </a:spcAft>
+            </a:pPr>
+            <a:r>
+              <a:rPr sz="1250" b="0">
+                <a:solidFill>
+                  <a:srgbClr val="2E3A46"/>
+                </a:solidFill>
+                <a:latin typeface="Calibri"/>
+              </a:rPr>
+              <a:t>Complex model ahead, but by less than 2.</a:t>
+            </a:r>
+          </a:p>
+        </p:txBody>
+      </p:sp>
+      <p:sp>
+        <p:nvSpPr>
+          <p:cNvPr id="40" name="TextBox 39"/>
+          <p:cNvSpPr txBox="1"/>
+          <p:nvPr/>
+        </p:nvSpPr>
+        <p:spPr>
+          <a:xfrm>
+            <a:off x="7203643" y="4700016"/>
+            <a:ext cx="1998878" cy="731520"/>
+          </a:xfrm>
+          <a:prstGeom prst="rect">
+            <a:avLst/>
+          </a:prstGeom>
+          <a:noFill/>
+        </p:spPr>
+        <p:txBody>
+          <a:bodyPr wrap="square" lIns="0" rIns="0" tIns="0" bIns="0">
+            <a:spAutoFit/>
+          </a:bodyPr>
+          <a:lstStyle/>
+          <a:p>
+            <a:pPr algn="l">
+              <a:spcAft>
+                <a:spcPts val="0"/>
+              </a:spcAft>
+            </a:pPr>
+            <a:r>
+              <a:rPr sz="1250" b="0">
+                <a:solidFill>
+                  <a:srgbClr val="2E3A46"/>
+                </a:solidFill>
+                <a:latin typeface="Calibri"/>
+              </a:rPr>
+              <a:t>Complex model behind. Pure noise lands here every time.</a:t>
+            </a:r>
+          </a:p>
+        </p:txBody>
+      </p:sp>
+      <p:sp>
+        <p:nvSpPr>
+          <p:cNvPr id="41" name="Rounded Rectangle 40"/>
+          <p:cNvSpPr/>
+          <p:nvPr/>
+        </p:nvSpPr>
+        <p:spPr>
+          <a:xfrm>
+            <a:off x="640080" y="5504688"/>
+            <a:ext cx="10908792" cy="1060704"/>
+          </a:xfrm>
+          <a:prstGeom prst="roundRect">
+            <a:avLst>
+              <a:gd name="adj" fmla="val 4000"/>
+            </a:avLst>
+          </a:prstGeom>
+          <a:solidFill>
+            <a:srgbClr val="FBF3E4"/>
+          </a:solidFill>
+          <a:ln w="12700">
+            <a:solidFill>
+              <a:srgbClr val="EBD5AE"/>
+            </a:solidFill>
+          </a:ln>
+          <a:effectLst/>
+        </p:spPr>
+        <p:style>
+          <a:lnRef idx="1">
+            <a:schemeClr val="accent1"/>
+          </a:lnRef>
+          <a:fillRef idx="3">
+            <a:schemeClr val="accent1"/>
+          </a:fillRef>
+          <a:effectRef idx="2">
+            <a:schemeClr val="accent1"/>
+          </a:effectRef>
+          <a:fontRef idx="minor">
+            <a:schemeClr val="lt1"/>
+          </a:fontRef>
+        </p:style>
+        <p:txBody>
+          <a:bodyPr rtlCol="0" anchor="ctr"/>
+          <a:lstStyle/>
+          <a:p>
+            <a:pPr algn="ctr"/>
+          </a:p>
+        </p:txBody>
+      </p:sp>
+      <p:sp>
+        <p:nvSpPr>
+          <p:cNvPr id="42" name="TextBox 41"/>
+          <p:cNvSpPr txBox="1"/>
+          <p:nvPr/>
+        </p:nvSpPr>
+        <p:spPr>
+          <a:xfrm>
+            <a:off x="868680" y="5614416"/>
+            <a:ext cx="10469880" cy="868680"/>
+          </a:xfrm>
+          <a:prstGeom prst="rect">
+            <a:avLst/>
+          </a:prstGeom>
+          <a:noFill/>
+        </p:spPr>
+        <p:txBody>
+          <a:bodyPr wrap="square" lIns="0" rIns="0" tIns="0" bIns="0">
+            <a:spAutoFit/>
+          </a:bodyPr>
+          <a:lstStyle/>
+          <a:p>
+            <a:pPr algn="l">
+              <a:spcAft>
+                <a:spcPts val="0"/>
+              </a:spcAft>
+            </a:pPr>
+            <a:r>
+              <a:rPr sz="1650" b="1">
+                <a:solidFill>
+                  <a:srgbClr val="2E3A46"/>
+                </a:solidFill>
+                <a:latin typeface="Calibri"/>
+              </a:rPr>
+              <a:t>Because χ²₁ is never negative, ΔAIC can never exceed 2. Landing “within 2” is guaranteed by the arithmetic, not earned by the data.</a:t>
+            </a:r>
+          </a:p>
+          <a:p>
+            <a:pPr algn="l">
+              <a:spcAft>
+                <a:spcPts val="0"/>
+              </a:spcAft>
+            </a:pPr>
+            <a:r>
+              <a:rPr sz="1550" b="0">
+                <a:solidFill>
+                  <a:srgbClr val="5A4A2E"/>
+                </a:solidFill>
+                <a:latin typeface="Calibri"/>
+              </a:rPr>
+              <a:t>On average χ²₁ = 1, so a useless parameter typically sits about 1 AIC unit behind — and 16% of the time χ²₁ exceeds 2, so it takes the lower AIC outright.</a:t>
             </a:r>
           </a:p>
         </p:txBody>
